--- a/docs/presentations/introduction.pptx
+++ b/docs/presentations/introduction.pptx
@@ -4919,7 +4919,7 @@
             </a:r>
             <a:r>
               <a:rPr/>
-              <a:t>odels using TLM</a:t>
+              <a:t>odels using facts</a:t>
             </a:r>
           </a:p>
         </p:txBody>
@@ -6575,7 +6575,7 @@
       </p:sp>
       <p:pic>
         <p:nvPicPr>
-          <p:cNvPr descr="../models/tlm-model-example.png" id="0" name="Picture 1"/>
+          <p:cNvPr descr="../models/model-example.png" id="0" name="Picture 1"/>
           <p:cNvPicPr>
             <a:picLocks noGrp="1" noChangeAspect="1"/>
           </p:cNvPicPr>
